--- a/posters/out/risalat-muharrafa-khatima.pptx
+++ b/posters/out/risalat-muharrafa-khatima.pptx
@@ -3623,8 +3623,8 @@
         </p:nvSpPr>
         <p:spPr>
           <a:xfrm>
-            <a:off x="6597491" y="6602432"/>
-            <a:ext cx="4311967" cy="422910"/>
+            <a:off x="6657835" y="6602432"/>
+            <a:ext cx="4191130" cy="422910"/>
           </a:xfrm>
           <a:prstGeom prst="rect">
             <a:avLst/>
@@ -3651,7 +3651,7 @@
                 <a:ea typeface="Tajawal"/>
                 <a:cs typeface="Tajawal"/>
               </a:rPr>
-              <a:t>النسب العنصرية والتجسيم</a:t>
+              <a:t>النسب والنفعية والتجسيم</a:t>
             </a:r>
           </a:p>
         </p:txBody>
